--- a/Templates/Childrens_Party_Invite_Template.pptx
+++ b/Templates/Childrens_Party_Invite_Template.pptx
@@ -120,7 +120,7 @@
   <pc:docChgLst>
     <pc:chgData name="Shane Gillespie [C]" userId="23d9c95d-eff8-40ff-a6f7-25a555eaf29f" providerId="ADAL" clId="{7D7DDF8E-BCA7-4ECD-995F-18AB804B7D32}"/>
     <pc:docChg chg="undo custSel addSld delSld modSld">
-      <pc:chgData name="Shane Gillespie [C]" userId="23d9c95d-eff8-40ff-a6f7-25a555eaf29f" providerId="ADAL" clId="{7D7DDF8E-BCA7-4ECD-995F-18AB804B7D32}" dt="2025-11-19T11:26:33.595" v="88" actId="20577"/>
+      <pc:chgData name="Shane Gillespie [C]" userId="23d9c95d-eff8-40ff-a6f7-25a555eaf29f" providerId="ADAL" clId="{7D7DDF8E-BCA7-4ECD-995F-18AB804B7D32}" dt="2025-11-20T14:00:32.593" v="90" actId="20577"/>
       <pc:docMkLst>
         <pc:docMk/>
       </pc:docMkLst>
@@ -137,46 +137,6 @@
           <pc:docMk/>
           <pc:sldMk cId="1182957005" sldId="259"/>
         </pc:sldMkLst>
-        <pc:spChg chg="add mod">
-          <ac:chgData name="Shane Gillespie [C]" userId="23d9c95d-eff8-40ff-a6f7-25a555eaf29f" providerId="ADAL" clId="{7D7DDF8E-BCA7-4ECD-995F-18AB804B7D32}" dt="2025-11-18T09:36:20.438" v="20" actId="1076"/>
-          <ac:spMkLst>
-            <pc:docMk/>
-            <pc:sldMk cId="1182957005" sldId="259"/>
-            <ac:spMk id="4" creationId="{1F985A07-87BF-D684-5C71-9256D936D6BE}"/>
-          </ac:spMkLst>
-        </pc:spChg>
-        <pc:spChg chg="add mod">
-          <ac:chgData name="Shane Gillespie [C]" userId="23d9c95d-eff8-40ff-a6f7-25a555eaf29f" providerId="ADAL" clId="{7D7DDF8E-BCA7-4ECD-995F-18AB804B7D32}" dt="2025-11-18T09:41:09.108" v="51" actId="20577"/>
-          <ac:spMkLst>
-            <pc:docMk/>
-            <pc:sldMk cId="1182957005" sldId="259"/>
-            <ac:spMk id="6" creationId="{D3810EA4-41DD-8DC6-CD16-E1464C54C3CF}"/>
-          </ac:spMkLst>
-        </pc:spChg>
-        <pc:picChg chg="add del mod modCrop">
-          <ac:chgData name="Shane Gillespie [C]" userId="23d9c95d-eff8-40ff-a6f7-25a555eaf29f" providerId="ADAL" clId="{7D7DDF8E-BCA7-4ECD-995F-18AB804B7D32}" dt="2025-11-18T09:43:08.233" v="59" actId="478"/>
-          <ac:picMkLst>
-            <pc:docMk/>
-            <pc:sldMk cId="1182957005" sldId="259"/>
-            <ac:picMk id="8" creationId="{8B82091D-EA3A-2A58-A2F1-A5FC94B38961}"/>
-          </ac:picMkLst>
-        </pc:picChg>
-        <pc:picChg chg="add mod">
-          <ac:chgData name="Shane Gillespie [C]" userId="23d9c95d-eff8-40ff-a6f7-25a555eaf29f" providerId="ADAL" clId="{7D7DDF8E-BCA7-4ECD-995F-18AB804B7D32}" dt="2025-11-18T09:43:11.507" v="60" actId="1076"/>
-          <ac:picMkLst>
-            <pc:docMk/>
-            <pc:sldMk cId="1182957005" sldId="259"/>
-            <ac:picMk id="10" creationId="{D28182C2-76F9-DDB7-9D18-A87D4F1A8DFC}"/>
-          </ac:picMkLst>
-        </pc:picChg>
-        <pc:picChg chg="add mod">
-          <ac:chgData name="Shane Gillespie [C]" userId="23d9c95d-eff8-40ff-a6f7-25a555eaf29f" providerId="ADAL" clId="{7D7DDF8E-BCA7-4ECD-995F-18AB804B7D32}" dt="2025-11-18T09:45:22.438" v="73" actId="1076"/>
-          <ac:picMkLst>
-            <pc:docMk/>
-            <pc:sldMk cId="1182957005" sldId="259"/>
-            <ac:picMk id="12" creationId="{AE57C4BB-15FA-4373-D016-97E7942ACFFE}"/>
-          </ac:picMkLst>
-        </pc:picChg>
       </pc:sldChg>
       <pc:sldChg chg="del">
         <pc:chgData name="Shane Gillespie [C]" userId="23d9c95d-eff8-40ff-a6f7-25a555eaf29f" providerId="ADAL" clId="{7D7DDF8E-BCA7-4ECD-995F-18AB804B7D32}" dt="2025-11-19T11:26:04.666" v="76" actId="47"/>
@@ -186,13 +146,13 @@
         </pc:sldMkLst>
       </pc:sldChg>
       <pc:sldChg chg="addSp modSp add mod">
-        <pc:chgData name="Shane Gillespie [C]" userId="23d9c95d-eff8-40ff-a6f7-25a555eaf29f" providerId="ADAL" clId="{7D7DDF8E-BCA7-4ECD-995F-18AB804B7D32}" dt="2025-11-19T11:26:33.595" v="88" actId="20577"/>
+        <pc:chgData name="Shane Gillespie [C]" userId="23d9c95d-eff8-40ff-a6f7-25a555eaf29f" providerId="ADAL" clId="{7D7DDF8E-BCA7-4ECD-995F-18AB804B7D32}" dt="2025-11-20T14:00:32.593" v="90" actId="20577"/>
         <pc:sldMkLst>
           <pc:docMk/>
           <pc:sldMk cId="1102402849" sldId="261"/>
         </pc:sldMkLst>
         <pc:spChg chg="mod">
-          <ac:chgData name="Shane Gillespie [C]" userId="23d9c95d-eff8-40ff-a6f7-25a555eaf29f" providerId="ADAL" clId="{7D7DDF8E-BCA7-4ECD-995F-18AB804B7D32}" dt="2025-11-19T11:26:33.595" v="88" actId="20577"/>
+          <ac:chgData name="Shane Gillespie [C]" userId="23d9c95d-eff8-40ff-a6f7-25a555eaf29f" providerId="ADAL" clId="{7D7DDF8E-BCA7-4ECD-995F-18AB804B7D32}" dt="2025-11-20T14:00:32.593" v="90" actId="20577"/>
           <ac:spMkLst>
             <pc:docMk/>
             <pc:sldMk cId="1102402849" sldId="261"/>
@@ -310,7 +270,7 @@
           <a:p>
             <a:fld id="{6C06ABD9-3C53-42A2-9732-D07B16E597F6}" type="datetimeFigureOut">
               <a:rPr lang="en-IE" smtClean="0"/>
-              <a:t>19/11/2025</a:t>
+              <a:t>20/11/2025</a:t>
             </a:fld>
             <a:endParaRPr lang="en-IE"/>
           </a:p>
@@ -727,7 +687,7 @@
           <a:p>
             <a:fld id="{F28EBEE0-8C8A-42AD-9FAA-5A42D0BA7AD9}" type="datetimeFigureOut">
               <a:rPr lang="en-GB" smtClean="0"/>
-              <a:t>19/11/2025</a:t>
+              <a:t>20/11/2025</a:t>
             </a:fld>
             <a:endParaRPr lang="en-GB"/>
           </a:p>
@@ -927,7 +887,7 @@
           <a:p>
             <a:fld id="{F28EBEE0-8C8A-42AD-9FAA-5A42D0BA7AD9}" type="datetimeFigureOut">
               <a:rPr lang="en-GB" smtClean="0"/>
-              <a:t>19/11/2025</a:t>
+              <a:t>20/11/2025</a:t>
             </a:fld>
             <a:endParaRPr lang="en-GB"/>
           </a:p>
@@ -1137,7 +1097,7 @@
           <a:p>
             <a:fld id="{F28EBEE0-8C8A-42AD-9FAA-5A42D0BA7AD9}" type="datetimeFigureOut">
               <a:rPr lang="en-GB" smtClean="0"/>
-              <a:t>19/11/2025</a:t>
+              <a:t>20/11/2025</a:t>
             </a:fld>
             <a:endParaRPr lang="en-GB"/>
           </a:p>
@@ -1337,7 +1297,7 @@
           <a:p>
             <a:fld id="{F28EBEE0-8C8A-42AD-9FAA-5A42D0BA7AD9}" type="datetimeFigureOut">
               <a:rPr lang="en-GB" smtClean="0"/>
-              <a:t>19/11/2025</a:t>
+              <a:t>20/11/2025</a:t>
             </a:fld>
             <a:endParaRPr lang="en-GB"/>
           </a:p>
@@ -1613,7 +1573,7 @@
           <a:p>
             <a:fld id="{F28EBEE0-8C8A-42AD-9FAA-5A42D0BA7AD9}" type="datetimeFigureOut">
               <a:rPr lang="en-GB" smtClean="0"/>
-              <a:t>19/11/2025</a:t>
+              <a:t>20/11/2025</a:t>
             </a:fld>
             <a:endParaRPr lang="en-GB"/>
           </a:p>
@@ -1881,7 +1841,7 @@
           <a:p>
             <a:fld id="{F28EBEE0-8C8A-42AD-9FAA-5A42D0BA7AD9}" type="datetimeFigureOut">
               <a:rPr lang="en-GB" smtClean="0"/>
-              <a:t>19/11/2025</a:t>
+              <a:t>20/11/2025</a:t>
             </a:fld>
             <a:endParaRPr lang="en-GB"/>
           </a:p>
@@ -2296,7 +2256,7 @@
           <a:p>
             <a:fld id="{F28EBEE0-8C8A-42AD-9FAA-5A42D0BA7AD9}" type="datetimeFigureOut">
               <a:rPr lang="en-GB" smtClean="0"/>
-              <a:t>19/11/2025</a:t>
+              <a:t>20/11/2025</a:t>
             </a:fld>
             <a:endParaRPr lang="en-GB"/>
           </a:p>
@@ -2438,7 +2398,7 @@
           <a:p>
             <a:fld id="{F28EBEE0-8C8A-42AD-9FAA-5A42D0BA7AD9}" type="datetimeFigureOut">
               <a:rPr lang="en-GB" smtClean="0"/>
-              <a:t>19/11/2025</a:t>
+              <a:t>20/11/2025</a:t>
             </a:fld>
             <a:endParaRPr lang="en-GB"/>
           </a:p>
@@ -2551,7 +2511,7 @@
           <a:p>
             <a:fld id="{F28EBEE0-8C8A-42AD-9FAA-5A42D0BA7AD9}" type="datetimeFigureOut">
               <a:rPr lang="en-GB" smtClean="0"/>
-              <a:t>19/11/2025</a:t>
+              <a:t>20/11/2025</a:t>
             </a:fld>
             <a:endParaRPr lang="en-GB"/>
           </a:p>
@@ -2864,7 +2824,7 @@
           <a:p>
             <a:fld id="{F28EBEE0-8C8A-42AD-9FAA-5A42D0BA7AD9}" type="datetimeFigureOut">
               <a:rPr lang="en-GB" smtClean="0"/>
-              <a:t>19/11/2025</a:t>
+              <a:t>20/11/2025</a:t>
             </a:fld>
             <a:endParaRPr lang="en-GB"/>
           </a:p>
@@ -3153,7 +3113,7 @@
           <a:p>
             <a:fld id="{F28EBEE0-8C8A-42AD-9FAA-5A42D0BA7AD9}" type="datetimeFigureOut">
               <a:rPr lang="en-GB" smtClean="0"/>
-              <a:t>19/11/2025</a:t>
+              <a:t>20/11/2025</a:t>
             </a:fld>
             <a:endParaRPr lang="en-GB"/>
           </a:p>
@@ -3396,7 +3356,7 @@
           <a:p>
             <a:fld id="{F28EBEE0-8C8A-42AD-9FAA-5A42D0BA7AD9}" type="datetimeFigureOut">
               <a:rPr lang="en-GB" smtClean="0"/>
-              <a:t>19/11/2025</a:t>
+              <a:t>20/11/2025</a:t>
             </a:fld>
             <a:endParaRPr lang="en-GB"/>
           </a:p>
@@ -3998,7 +3958,7 @@
               <a:rPr lang="en-IE" altLang="en-US" sz="3200" dirty="0">
                 <a:latin typeface="Monotype Corsiva" panose="03010101010201010101" pitchFamily="66" charset="0"/>
               </a:rPr>
-              <a:t>,</a:t>
+              <a:t>!</a:t>
             </a:r>
           </a:p>
           <a:p>
@@ -4020,19 +3980,7 @@
               <a:rPr lang="en-IE" altLang="en-US" sz="3200" dirty="0">
                 <a:latin typeface="Monotype Corsiva" panose="03010101010201010101" pitchFamily="66" charset="0"/>
               </a:rPr>
-              <a:t>I am delighted to </a:t>
-            </a:r>
-            <a:r>
-              <a:rPr lang="en-IE" altLang="en-US" sz="3200">
-                <a:latin typeface="Monotype Corsiva" panose="03010101010201010101" pitchFamily="66" charset="0"/>
-              </a:rPr>
-              <a:t>invite {{NAMES}} </a:t>
-            </a:r>
-            <a:r>
-              <a:rPr lang="en-IE" altLang="en-US" sz="3200" dirty="0">
-                <a:latin typeface="Monotype Corsiva" panose="03010101010201010101" pitchFamily="66" charset="0"/>
-              </a:rPr>
-              <a:t>to meet me at the Coca-Cola Ballina Children’s Christmas Party, in The Diamond Coast Hotel On Sunday December 20, 2025 at 14:00</a:t>
+              <a:t>I am delighted to invite {{NAMES}} to meet me at the Coca-Cola Ballina Children’s Christmas Party, in The Diamond Coast Hotel On Sunday December 20, 2025 at 14:00</a:t>
             </a:r>
           </a:p>
           <a:p>
